--- a/Методы принятия управленческих решений/Контрольная работа 1/КР1.pptx
+++ b/Методы принятия управленческих решений/Контрольная работа 1/КР1.pptx
@@ -16222,13 +16222,13 @@
           <a:p>
             <a:pPr algn="l"/>
             <a:r>
-              <a:rPr lang="ru-RU" sz="1600" b="1" dirty="0" err="1">
+              <a:rPr lang="ru-RU" sz="1600" b="1" dirty="0">
                 <a:solidFill>
                   <a:srgbClr val="1F2937"/>
                 </a:solidFill>
                 <a:latin typeface="Arial"/>
               </a:rPr>
-              <a:t>Зубаре</a:t>
+              <a:t>Зубарев В.С.</a:t>
             </a:r>
             <a:endParaRPr sz="1600" b="1" dirty="0">
               <a:solidFill>
@@ -19110,7 +19110,7 @@
         <p:spPr>
           <a:xfrm>
             <a:off x="731520" y="2011680"/>
-            <a:ext cx="3246120" cy="685800"/>
+            <a:ext cx="3246120" cy="701731"/>
           </a:xfrm>
           <a:prstGeom prst="rect">
             <a:avLst/>
@@ -19125,13 +19125,13 @@
           <a:p>
             <a:pPr algn="l"/>
             <a:r>
-              <a:rPr sz="1200" b="0">
-                <a:solidFill>
-                  <a:srgbClr val="6B7280"/>
-                </a:solidFill>
-                <a:latin typeface="Arial"/>
-              </a:rPr>
-              <a:t>сложно найти понятную информацию о правилах поступления и доступной среде</a:t>
+              <a:rPr lang="ru-RU" sz="1400" b="0" dirty="0">
+                <a:solidFill>
+                  <a:srgbClr val="6B7280"/>
+                </a:solidFill>
+                <a:latin typeface="Arial"/>
+              </a:rPr>
+              <a:t>Сложно найти понятную информацию о правилах поступления и доступной среде</a:t>
             </a:r>
           </a:p>
         </p:txBody>
@@ -19270,7 +19270,7 @@
         <p:spPr>
           <a:xfrm>
             <a:off x="4617720" y="2011680"/>
-            <a:ext cx="3246120" cy="685800"/>
+            <a:ext cx="3246120" cy="701731"/>
           </a:xfrm>
           <a:prstGeom prst="rect">
             <a:avLst/>
@@ -19285,13 +19285,13 @@
           <a:p>
             <a:pPr algn="l"/>
             <a:r>
-              <a:rPr sz="1200" b="0">
-                <a:solidFill>
-                  <a:srgbClr val="6B7280"/>
-                </a:solidFill>
-                <a:latin typeface="Arial"/>
-              </a:rPr>
-              <a:t>неясно, где находятся аудитории, службы поддержки, приёмная комиссия</a:t>
+              <a:rPr lang="ru-RU" sz="1400" b="0" dirty="0">
+                <a:solidFill>
+                  <a:srgbClr val="6B7280"/>
+                </a:solidFill>
+                <a:latin typeface="Arial"/>
+              </a:rPr>
+              <a:t>Неясно, где находятся аудитории, службы поддержки, приёмная комиссия</a:t>
             </a:r>
           </a:p>
         </p:txBody>
@@ -19430,7 +19430,7 @@
         <p:spPr>
           <a:xfrm>
             <a:off x="8503920" y="2011680"/>
-            <a:ext cx="3246120" cy="685800"/>
+            <a:ext cx="3246120" cy="486287"/>
           </a:xfrm>
           <a:prstGeom prst="rect">
             <a:avLst/>
@@ -19445,13 +19445,13 @@
           <a:p>
             <a:pPr algn="l"/>
             <a:r>
-              <a:rPr sz="1200" b="0">
-                <a:solidFill>
-                  <a:srgbClr val="6B7280"/>
-                </a:solidFill>
-                <a:latin typeface="Arial"/>
-              </a:rPr>
-              <a:t>страх обращаться за помощью, недостаток опыта общения с вузом</a:t>
+              <a:rPr lang="ru-RU" sz="1400" b="0" dirty="0">
+                <a:solidFill>
+                  <a:srgbClr val="6B7280"/>
+                </a:solidFill>
+                <a:latin typeface="Arial"/>
+              </a:rPr>
+              <a:t>Страх обращаться за помощью, недостаток опыта общения с вузом</a:t>
             </a:r>
           </a:p>
         </p:txBody>
@@ -19464,8 +19464,8 @@
         </p:nvSpPr>
         <p:spPr>
           <a:xfrm>
-            <a:off x="594360" y="3291839"/>
-            <a:ext cx="3520440" cy="1417320"/>
+            <a:off x="594360" y="3291838"/>
+            <a:ext cx="3520440" cy="1648755"/>
           </a:xfrm>
           <a:prstGeom prst="roundRect">
             <a:avLst/>
@@ -19590,7 +19590,7 @@
         <p:spPr>
           <a:xfrm>
             <a:off x="731520" y="3886200"/>
-            <a:ext cx="3246120" cy="685800"/>
+            <a:ext cx="3246120" cy="486287"/>
           </a:xfrm>
           <a:prstGeom prst="rect">
             <a:avLst/>
@@ -19605,13 +19605,13 @@
           <a:p>
             <a:pPr algn="l"/>
             <a:r>
-              <a:rPr sz="1200" b="0">
-                <a:solidFill>
-                  <a:srgbClr val="6B7280"/>
-                </a:solidFill>
-                <a:latin typeface="Arial"/>
-              </a:rPr>
-              <a:t>тревожность, неуверенность, опасение изоляции в новой группе</a:t>
+              <a:rPr lang="ru-RU" sz="1400" b="0" dirty="0">
+                <a:solidFill>
+                  <a:srgbClr val="6B7280"/>
+                </a:solidFill>
+                <a:latin typeface="Arial"/>
+              </a:rPr>
+              <a:t>Тревожность, неуверенность, опасение изоляции в новой группе</a:t>
             </a:r>
           </a:p>
         </p:txBody>
@@ -19624,8 +19624,8 @@
         </p:nvSpPr>
         <p:spPr>
           <a:xfrm>
-            <a:off x="4480560" y="3291839"/>
-            <a:ext cx="3520440" cy="1417320"/>
+            <a:off x="4480560" y="3291838"/>
+            <a:ext cx="3520440" cy="1648755"/>
           </a:xfrm>
           <a:prstGeom prst="roundRect">
             <a:avLst/>
@@ -19750,7 +19750,7 @@
         <p:spPr>
           <a:xfrm>
             <a:off x="4617720" y="3886200"/>
-            <a:ext cx="3246120" cy="685800"/>
+            <a:ext cx="3246120" cy="486287"/>
           </a:xfrm>
           <a:prstGeom prst="rect">
             <a:avLst/>
@@ -19765,13 +19765,13 @@
           <a:p>
             <a:pPr algn="l"/>
             <a:r>
-              <a:rPr sz="1200" b="0">
-                <a:solidFill>
-                  <a:srgbClr val="6B7280"/>
-                </a:solidFill>
-                <a:latin typeface="Arial"/>
-              </a:rPr>
-              <a:t>непонятные сроки, документы, маршруты получения сопровождения</a:t>
+              <a:rPr lang="ru-RU" sz="1400" b="0" dirty="0">
+                <a:solidFill>
+                  <a:srgbClr val="6B7280"/>
+                </a:solidFill>
+                <a:latin typeface="Arial"/>
+              </a:rPr>
+              <a:t>Непонятные сроки, документы, маршруты получения сопровождения</a:t>
             </a:r>
           </a:p>
         </p:txBody>
@@ -19784,8 +19784,8 @@
         </p:nvSpPr>
         <p:spPr>
           <a:xfrm>
-            <a:off x="8183879" y="3291840"/>
-            <a:ext cx="3520440" cy="1417320"/>
+            <a:off x="8183879" y="3291839"/>
+            <a:ext cx="3520440" cy="1648755"/>
           </a:xfrm>
           <a:prstGeom prst="roundRect">
             <a:avLst/>
@@ -19910,7 +19910,7 @@
         <p:spPr>
           <a:xfrm>
             <a:off x="8321040" y="3886200"/>
-            <a:ext cx="3246120" cy="685800"/>
+            <a:ext cx="3246120" cy="917174"/>
           </a:xfrm>
           <a:prstGeom prst="rect">
             <a:avLst/>
@@ -19925,7 +19925,7 @@
           <a:p>
             <a:pPr algn="l"/>
             <a:r>
-              <a:rPr sz="1200" b="0">
+              <a:rPr lang="ru-RU" sz="1400" b="0" dirty="0">
                 <a:solidFill>
                   <a:srgbClr val="6B7280"/>
                 </a:solidFill>
